--- a/Slides/Slide 4 - Fluxo e características dos dados produzidos por sensores.pptx
+++ b/Slides/Slide 4 - Fluxo e características dos dados produzidos por sensores.pptx
@@ -3869,7 +3869,7 @@
           </a:prstGeom>
           <a:extLst>
             <a:ext uri="{C572A759-6A51-4108-AA02-DFA0A04FC94B}">
-              <ma14:wrappingTextBoxFlag xmlns:ma14="http://schemas.microsoft.com/office/mac/drawingml/2011/main" xmlns="" val="0"/>
+              <ma14:wrappingTextBoxFlag xmlns="" xmlns:ma14="http://schemas.microsoft.com/office/mac/drawingml/2011/main" val="0"/>
             </a:ext>
           </a:extLst>
         </p:spPr>
@@ -3944,7 +3944,7 @@
           </a:prstGeom>
           <a:extLst>
             <a:ext uri="{C572A759-6A51-4108-AA02-DFA0A04FC94B}">
-              <ma14:wrappingTextBoxFlag xmlns:ma14="http://schemas.microsoft.com/office/mac/drawingml/2011/main" xmlns="" val="0"/>
+              <ma14:wrappingTextBoxFlag xmlns="" xmlns:ma14="http://schemas.microsoft.com/office/mac/drawingml/2011/main" val="0"/>
             </a:ext>
           </a:extLst>
         </p:spPr>
@@ -4869,7 +4869,7 @@
           </a:prstGeom>
           <a:extLst>
             <a:ext uri="{C572A759-6A51-4108-AA02-DFA0A04FC94B}">
-              <ma14:wrappingTextBoxFlag xmlns:ma14="http://schemas.microsoft.com/office/mac/drawingml/2011/main" xmlns="" val="0"/>
+              <ma14:wrappingTextBoxFlag xmlns="" xmlns:ma14="http://schemas.microsoft.com/office/mac/drawingml/2011/main" val="0"/>
             </a:ext>
           </a:extLst>
         </p:spPr>
@@ -5547,7 +5547,7 @@
           </a:prstGeom>
           <a:extLst>
             <a:ext uri="{C572A759-6A51-4108-AA02-DFA0A04FC94B}">
-              <ma14:wrappingTextBoxFlag xmlns:ma14="http://schemas.microsoft.com/office/mac/drawingml/2011/main" xmlns="" val="0"/>
+              <ma14:wrappingTextBoxFlag xmlns="" xmlns:ma14="http://schemas.microsoft.com/office/mac/drawingml/2011/main" val="0"/>
             </a:ext>
           </a:extLst>
         </p:spPr>
@@ -6146,7 +6146,7 @@
           </a:prstGeom>
           <a:extLst>
             <a:ext uri="{C572A759-6A51-4108-AA02-DFA0A04FC94B}">
-              <ma14:wrappingTextBoxFlag xmlns:ma14="http://schemas.microsoft.com/office/mac/drawingml/2011/main" xmlns="" val="0"/>
+              <ma14:wrappingTextBoxFlag xmlns="" xmlns:ma14="http://schemas.microsoft.com/office/mac/drawingml/2011/main" val="0"/>
             </a:ext>
           </a:extLst>
         </p:spPr>
@@ -6971,7 +6971,7 @@
           </a:prstGeom>
           <a:extLst>
             <a:ext uri="{C572A759-6A51-4108-AA02-DFA0A04FC94B}">
-              <ma14:wrappingTextBoxFlag xmlns:ma14="http://schemas.microsoft.com/office/mac/drawingml/2011/main" xmlns="" val="0"/>
+              <ma14:wrappingTextBoxFlag xmlns="" xmlns:ma14="http://schemas.microsoft.com/office/mac/drawingml/2011/main" val="0"/>
             </a:ext>
           </a:extLst>
         </p:spPr>
@@ -7649,7 +7649,7 @@
           </a:prstGeom>
           <a:extLst>
             <a:ext uri="{C572A759-6A51-4108-AA02-DFA0A04FC94B}">
-              <ma14:wrappingTextBoxFlag xmlns:ma14="http://schemas.microsoft.com/office/mac/drawingml/2011/main" xmlns="" val="0"/>
+              <ma14:wrappingTextBoxFlag xmlns="" xmlns:ma14="http://schemas.microsoft.com/office/mac/drawingml/2011/main" val="0"/>
             </a:ext>
           </a:extLst>
         </p:spPr>
@@ -8248,7 +8248,7 @@
           </a:prstGeom>
           <a:extLst>
             <a:ext uri="{C572A759-6A51-4108-AA02-DFA0A04FC94B}">
-              <ma14:wrappingTextBoxFlag xmlns:ma14="http://schemas.microsoft.com/office/mac/drawingml/2011/main" xmlns="" val="0"/>
+              <ma14:wrappingTextBoxFlag xmlns="" xmlns:ma14="http://schemas.microsoft.com/office/mac/drawingml/2011/main" val="0"/>
             </a:ext>
           </a:extLst>
         </p:spPr>
@@ -8919,7 +8919,7 @@
           </a:prstGeom>
           <a:extLst>
             <a:ext uri="{C572A759-6A51-4108-AA02-DFA0A04FC94B}">
-              <ma14:wrappingTextBoxFlag xmlns:ma14="http://schemas.microsoft.com/office/mac/drawingml/2011/main" xmlns="" val="0"/>
+              <ma14:wrappingTextBoxFlag xmlns="" xmlns:ma14="http://schemas.microsoft.com/office/mac/drawingml/2011/main" val="0"/>
             </a:ext>
           </a:extLst>
         </p:spPr>
@@ -9492,7 +9492,7 @@
           </a:prstGeom>
           <a:extLst>
             <a:ext uri="{C572A759-6A51-4108-AA02-DFA0A04FC94B}">
-              <ma14:wrappingTextBoxFlag xmlns:ma14="http://schemas.microsoft.com/office/mac/drawingml/2011/main" xmlns="" val="0"/>
+              <ma14:wrappingTextBoxFlag xmlns="" xmlns:ma14="http://schemas.microsoft.com/office/mac/drawingml/2011/main" val="0"/>
             </a:ext>
           </a:extLst>
         </p:spPr>
@@ -10170,7 +10170,7 @@
           </a:prstGeom>
           <a:extLst>
             <a:ext uri="{C572A759-6A51-4108-AA02-DFA0A04FC94B}">
-              <ma14:wrappingTextBoxFlag xmlns:ma14="http://schemas.microsoft.com/office/mac/drawingml/2011/main" xmlns="" val="0"/>
+              <ma14:wrappingTextBoxFlag xmlns="" xmlns:ma14="http://schemas.microsoft.com/office/mac/drawingml/2011/main" val="0"/>
             </a:ext>
           </a:extLst>
         </p:spPr>
@@ -10777,7 +10777,7 @@
           </a:prstGeom>
           <a:extLst>
             <a:ext uri="{C572A759-6A51-4108-AA02-DFA0A04FC94B}">
-              <ma14:wrappingTextBoxFlag xmlns:ma14="http://schemas.microsoft.com/office/mac/drawingml/2011/main" xmlns="" val="0"/>
+              <ma14:wrappingTextBoxFlag xmlns="" xmlns:ma14="http://schemas.microsoft.com/office/mac/drawingml/2011/main" val="0"/>
             </a:ext>
           </a:extLst>
         </p:spPr>
@@ -11455,7 +11455,7 @@
           </a:prstGeom>
           <a:extLst>
             <a:ext uri="{C572A759-6A51-4108-AA02-DFA0A04FC94B}">
-              <ma14:wrappingTextBoxFlag xmlns:ma14="http://schemas.microsoft.com/office/mac/drawingml/2011/main" xmlns="" val="0"/>
+              <ma14:wrappingTextBoxFlag xmlns="" xmlns:ma14="http://schemas.microsoft.com/office/mac/drawingml/2011/main" val="0"/>
             </a:ext>
           </a:extLst>
         </p:spPr>
@@ -12113,7 +12113,7 @@
           </a:prstGeom>
           <a:extLst>
             <a:ext uri="{C572A759-6A51-4108-AA02-DFA0A04FC94B}">
-              <ma14:wrappingTextBoxFlag xmlns:ma14="http://schemas.microsoft.com/office/mac/drawingml/2011/main" xmlns="" val="0"/>
+              <ma14:wrappingTextBoxFlag xmlns="" xmlns:ma14="http://schemas.microsoft.com/office/mac/drawingml/2011/main" val="0"/>
             </a:ext>
           </a:extLst>
         </p:spPr>
@@ -12712,7 +12712,7 @@
           </a:prstGeom>
           <a:extLst>
             <a:ext uri="{C572A759-6A51-4108-AA02-DFA0A04FC94B}">
-              <ma14:wrappingTextBoxFlag xmlns:ma14="http://schemas.microsoft.com/office/mac/drawingml/2011/main" xmlns="" val="0"/>
+              <ma14:wrappingTextBoxFlag xmlns="" xmlns:ma14="http://schemas.microsoft.com/office/mac/drawingml/2011/main" val="0"/>
             </a:ext>
           </a:extLst>
         </p:spPr>
@@ -13383,7 +13383,7 @@
           </a:prstGeom>
           <a:extLst>
             <a:ext uri="{C572A759-6A51-4108-AA02-DFA0A04FC94B}">
-              <ma14:wrappingTextBoxFlag xmlns:ma14="http://schemas.microsoft.com/office/mac/drawingml/2011/main" xmlns="" val="0"/>
+              <ma14:wrappingTextBoxFlag xmlns="" xmlns:ma14="http://schemas.microsoft.com/office/mac/drawingml/2011/main" val="0"/>
             </a:ext>
           </a:extLst>
         </p:spPr>
@@ -14054,7 +14054,7 @@
           </a:prstGeom>
           <a:extLst>
             <a:ext uri="{C572A759-6A51-4108-AA02-DFA0A04FC94B}">
-              <ma14:wrappingTextBoxFlag xmlns:ma14="http://schemas.microsoft.com/office/mac/drawingml/2011/main" xmlns="" val="0"/>
+              <ma14:wrappingTextBoxFlag xmlns="" xmlns:ma14="http://schemas.microsoft.com/office/mac/drawingml/2011/main" val="0"/>
             </a:ext>
           </a:extLst>
         </p:spPr>
@@ -14725,7 +14725,7 @@
           </a:prstGeom>
           <a:extLst>
             <a:ext uri="{C572A759-6A51-4108-AA02-DFA0A04FC94B}">
-              <ma14:wrappingTextBoxFlag xmlns:ma14="http://schemas.microsoft.com/office/mac/drawingml/2011/main" xmlns="" val="0"/>
+              <ma14:wrappingTextBoxFlag xmlns="" xmlns:ma14="http://schemas.microsoft.com/office/mac/drawingml/2011/main" val="0"/>
             </a:ext>
           </a:extLst>
         </p:spPr>
@@ -15304,7 +15304,7 @@
           </a:prstGeom>
           <a:extLst>
             <a:ext uri="{C572A759-6A51-4108-AA02-DFA0A04FC94B}">
-              <ma14:wrappingTextBoxFlag xmlns:ma14="http://schemas.microsoft.com/office/mac/drawingml/2011/main" xmlns="" val="0"/>
+              <ma14:wrappingTextBoxFlag xmlns="" xmlns:ma14="http://schemas.microsoft.com/office/mac/drawingml/2011/main" val="0"/>
             </a:ext>
           </a:extLst>
         </p:spPr>
@@ -15903,7 +15903,7 @@
           </a:prstGeom>
           <a:extLst>
             <a:ext uri="{C572A759-6A51-4108-AA02-DFA0A04FC94B}">
-              <ma14:wrappingTextBoxFlag xmlns:ma14="http://schemas.microsoft.com/office/mac/drawingml/2011/main" xmlns="" val="0"/>
+              <ma14:wrappingTextBoxFlag xmlns="" xmlns:ma14="http://schemas.microsoft.com/office/mac/drawingml/2011/main" val="0"/>
             </a:ext>
           </a:extLst>
         </p:spPr>
@@ -16412,7 +16412,7 @@
           </a:prstGeom>
           <a:extLst>
             <a:ext uri="{C572A759-6A51-4108-AA02-DFA0A04FC94B}">
-              <ma14:wrappingTextBoxFlag xmlns:ma14="http://schemas.microsoft.com/office/mac/drawingml/2011/main" xmlns="" val="0"/>
+              <ma14:wrappingTextBoxFlag xmlns="" xmlns:ma14="http://schemas.microsoft.com/office/mac/drawingml/2011/main" val="0"/>
             </a:ext>
           </a:extLst>
         </p:spPr>
@@ -17237,7 +17237,7 @@
           </a:prstGeom>
           <a:extLst>
             <a:ext uri="{C572A759-6A51-4108-AA02-DFA0A04FC94B}">
-              <ma14:wrappingTextBoxFlag xmlns:ma14="http://schemas.microsoft.com/office/mac/drawingml/2011/main" xmlns="" val="0"/>
+              <ma14:wrappingTextBoxFlag xmlns="" xmlns:ma14="http://schemas.microsoft.com/office/mac/drawingml/2011/main" val="0"/>
             </a:ext>
           </a:extLst>
         </p:spPr>
@@ -17908,7 +17908,7 @@
           </a:prstGeom>
           <a:extLst>
             <a:ext uri="{C572A759-6A51-4108-AA02-DFA0A04FC94B}">
-              <ma14:wrappingTextBoxFlag xmlns:ma14="http://schemas.microsoft.com/office/mac/drawingml/2011/main" xmlns="" val="0"/>
+              <ma14:wrappingTextBoxFlag xmlns="" xmlns:ma14="http://schemas.microsoft.com/office/mac/drawingml/2011/main" val="0"/>
             </a:ext>
           </a:extLst>
         </p:spPr>
@@ -18507,7 +18507,7 @@
           </a:prstGeom>
           <a:extLst>
             <a:ext uri="{C572A759-6A51-4108-AA02-DFA0A04FC94B}">
-              <ma14:wrappingTextBoxFlag xmlns:ma14="http://schemas.microsoft.com/office/mac/drawingml/2011/main" xmlns="" val="0"/>
+              <ma14:wrappingTextBoxFlag xmlns="" xmlns:ma14="http://schemas.microsoft.com/office/mac/drawingml/2011/main" val="0"/>
             </a:ext>
           </a:extLst>
         </p:spPr>
@@ -19019,7 +19019,7 @@
           </a:prstGeom>
           <a:extLst>
             <a:ext uri="{C572A759-6A51-4108-AA02-DFA0A04FC94B}">
-              <ma14:wrappingTextBoxFlag xmlns:ma14="http://schemas.microsoft.com/office/mac/drawingml/2011/main" xmlns="" val="0"/>
+              <ma14:wrappingTextBoxFlag xmlns="" xmlns:ma14="http://schemas.microsoft.com/office/mac/drawingml/2011/main" val="0"/>
             </a:ext>
           </a:extLst>
         </p:spPr>
@@ -19761,7 +19761,7 @@
           </a:prstGeom>
           <a:extLst>
             <a:ext uri="{C572A759-6A51-4108-AA02-DFA0A04FC94B}">
-              <ma14:wrappingTextBoxFlag xmlns:ma14="http://schemas.microsoft.com/office/mac/drawingml/2011/main" xmlns="" val="0"/>
+              <ma14:wrappingTextBoxFlag xmlns="" xmlns:ma14="http://schemas.microsoft.com/office/mac/drawingml/2011/main" val="0"/>
             </a:ext>
           </a:extLst>
         </p:spPr>
@@ -20360,7 +20360,7 @@
           </a:prstGeom>
           <a:extLst>
             <a:ext uri="{C572A759-6A51-4108-AA02-DFA0A04FC94B}">
-              <ma14:wrappingTextBoxFlag xmlns:ma14="http://schemas.microsoft.com/office/mac/drawingml/2011/main" xmlns="" val="0"/>
+              <ma14:wrappingTextBoxFlag xmlns="" xmlns:ma14="http://schemas.microsoft.com/office/mac/drawingml/2011/main" val="0"/>
             </a:ext>
           </a:extLst>
         </p:spPr>
@@ -20984,7 +20984,7 @@
           </a:prstGeom>
           <a:extLst>
             <a:ext uri="{C572A759-6A51-4108-AA02-DFA0A04FC94B}">
-              <ma14:wrappingTextBoxFlag xmlns:ma14="http://schemas.microsoft.com/office/mac/drawingml/2011/main" xmlns="" val="0"/>
+              <ma14:wrappingTextBoxFlag xmlns="" xmlns:ma14="http://schemas.microsoft.com/office/mac/drawingml/2011/main" val="0"/>
             </a:ext>
           </a:extLst>
         </p:spPr>
@@ -21677,7 +21677,7 @@
           </a:prstGeom>
           <a:extLst>
             <a:ext uri="{C572A759-6A51-4108-AA02-DFA0A04FC94B}">
-              <ma14:wrappingTextBoxFlag xmlns:ma14="http://schemas.microsoft.com/office/mac/drawingml/2011/main" xmlns="" val="0"/>
+              <ma14:wrappingTextBoxFlag xmlns="" xmlns:ma14="http://schemas.microsoft.com/office/mac/drawingml/2011/main" val="0"/>
             </a:ext>
           </a:extLst>
         </p:spPr>
@@ -22177,7 +22177,7 @@
           </a:prstGeom>
           <a:extLst>
             <a:ext uri="{C572A759-6A51-4108-AA02-DFA0A04FC94B}">
-              <ma14:wrappingTextBoxFlag xmlns:ma14="http://schemas.microsoft.com/office/mac/drawingml/2011/main" xmlns="" val="0"/>
+              <ma14:wrappingTextBoxFlag xmlns="" xmlns:ma14="http://schemas.microsoft.com/office/mac/drawingml/2011/main" val="0"/>
             </a:ext>
           </a:extLst>
         </p:spPr>
@@ -22919,7 +22919,7 @@
           </a:prstGeom>
           <a:extLst>
             <a:ext uri="{C572A759-6A51-4108-AA02-DFA0A04FC94B}">
-              <ma14:wrappingTextBoxFlag xmlns:ma14="http://schemas.microsoft.com/office/mac/drawingml/2011/main" xmlns="" val="0"/>
+              <ma14:wrappingTextBoxFlag xmlns="" xmlns:ma14="http://schemas.microsoft.com/office/mac/drawingml/2011/main" val="0"/>
             </a:ext>
           </a:extLst>
         </p:spPr>
@@ -23483,7 +23483,7 @@
           </a:prstGeom>
           <a:extLst>
             <a:ext uri="{C572A759-6A51-4108-AA02-DFA0A04FC94B}">
-              <ma14:wrappingTextBoxFlag xmlns:ma14="http://schemas.microsoft.com/office/mac/drawingml/2011/main" xmlns="" val="0"/>
+              <ma14:wrappingTextBoxFlag xmlns="" xmlns:ma14="http://schemas.microsoft.com/office/mac/drawingml/2011/main" val="0"/>
             </a:ext>
           </a:extLst>
         </p:spPr>
@@ -24225,7 +24225,7 @@
           </a:prstGeom>
           <a:extLst>
             <a:ext uri="{C572A759-6A51-4108-AA02-DFA0A04FC94B}">
-              <ma14:wrappingTextBoxFlag xmlns:ma14="http://schemas.microsoft.com/office/mac/drawingml/2011/main" xmlns="" val="0"/>
+              <ma14:wrappingTextBoxFlag xmlns="" xmlns:ma14="http://schemas.microsoft.com/office/mac/drawingml/2011/main" val="0"/>
             </a:ext>
           </a:extLst>
         </p:spPr>
@@ -24862,7 +24862,7 @@
           </a:prstGeom>
           <a:extLst>
             <a:ext uri="{C572A759-6A51-4108-AA02-DFA0A04FC94B}">
-              <ma14:wrappingTextBoxFlag xmlns:ma14="http://schemas.microsoft.com/office/mac/drawingml/2011/main" xmlns="" val="0"/>
+              <ma14:wrappingTextBoxFlag xmlns="" xmlns:ma14="http://schemas.microsoft.com/office/mac/drawingml/2011/main" val="0"/>
             </a:ext>
           </a:extLst>
         </p:spPr>
@@ -25388,7 +25388,7 @@
           </a:prstGeom>
           <a:extLst>
             <a:ext uri="{C572A759-6A51-4108-AA02-DFA0A04FC94B}">
-              <ma14:wrappingTextBoxFlag xmlns:ma14="http://schemas.microsoft.com/office/mac/drawingml/2011/main" xmlns="" val="0"/>
+              <ma14:wrappingTextBoxFlag xmlns="" xmlns:ma14="http://schemas.microsoft.com/office/mac/drawingml/2011/main" val="0"/>
             </a:ext>
           </a:extLst>
         </p:spPr>
@@ -26000,7 +26000,7 @@
           </a:prstGeom>
           <a:extLst>
             <a:ext uri="{C572A759-6A51-4108-AA02-DFA0A04FC94B}">
-              <ma14:wrappingTextBoxFlag xmlns:ma14="http://schemas.microsoft.com/office/mac/drawingml/2011/main" xmlns="" val="0"/>
+              <ma14:wrappingTextBoxFlag xmlns="" xmlns:ma14="http://schemas.microsoft.com/office/mac/drawingml/2011/main" val="0"/>
             </a:ext>
           </a:extLst>
         </p:spPr>
@@ -26742,7 +26742,7 @@
           </a:prstGeom>
           <a:extLst>
             <a:ext uri="{C572A759-6A51-4108-AA02-DFA0A04FC94B}">
-              <ma14:wrappingTextBoxFlag xmlns:ma14="http://schemas.microsoft.com/office/mac/drawingml/2011/main" xmlns="" val="0"/>
+              <ma14:wrappingTextBoxFlag xmlns="" xmlns:ma14="http://schemas.microsoft.com/office/mac/drawingml/2011/main" val="0"/>
             </a:ext>
           </a:extLst>
         </p:spPr>
@@ -27332,7 +27332,7 @@
           </a:prstGeom>
           <a:extLst>
             <a:ext uri="{C572A759-6A51-4108-AA02-DFA0A04FC94B}">
-              <ma14:wrappingTextBoxFlag xmlns:ma14="http://schemas.microsoft.com/office/mac/drawingml/2011/main" xmlns="" val="0"/>
+              <ma14:wrappingTextBoxFlag xmlns="" xmlns:ma14="http://schemas.microsoft.com/office/mac/drawingml/2011/main" val="0"/>
             </a:ext>
           </a:extLst>
         </p:spPr>
@@ -27844,7 +27844,7 @@
               <a:buNone/>
             </a:pPr>
             <a:r>
-              <a:rPr lang="en-US" sz="1150" dirty="0">
+              <a:rPr lang="en-US" sz="1600" dirty="0">
                 <a:solidFill>
                   <a:srgbClr val="1E293B"/>
                 </a:solidFill>
@@ -27854,14 +27854,14 @@
               </a:rPr>
               <a:t>• temperatura</a:t>
             </a:r>
-            <a:endParaRPr lang="en-US" sz="1150" dirty="0"/>
-          </a:p>
-          <a:p>
-            <a:pPr marL="0" indent="0">
-              <a:buNone/>
-            </a:pPr>
-            <a:r>
-              <a:rPr lang="en-US" sz="1150" dirty="0">
+            <a:endParaRPr lang="en-US" sz="1600" dirty="0"/>
+          </a:p>
+          <a:p>
+            <a:pPr marL="0" indent="0">
+              <a:buNone/>
+            </a:pPr>
+            <a:r>
+              <a:rPr lang="en-US" sz="1600" dirty="0">
                 <a:solidFill>
                   <a:srgbClr val="1E293B"/>
                 </a:solidFill>
@@ -27871,14 +27871,14 @@
               </a:rPr>
               <a:t>• pressão</a:t>
             </a:r>
-            <a:endParaRPr lang="en-US" sz="1150" dirty="0"/>
-          </a:p>
-          <a:p>
-            <a:pPr marL="0" indent="0">
-              <a:buNone/>
-            </a:pPr>
-            <a:r>
-              <a:rPr lang="en-US" sz="1150" dirty="0">
+            <a:endParaRPr lang="en-US" sz="1600" dirty="0"/>
+          </a:p>
+          <a:p>
+            <a:pPr marL="0" indent="0">
+              <a:buNone/>
+            </a:pPr>
+            <a:r>
+              <a:rPr lang="en-US" sz="1600" dirty="0">
                 <a:solidFill>
                   <a:srgbClr val="1E293B"/>
                 </a:solidFill>
@@ -27888,7 +27888,7 @@
               </a:rPr>
               <a:t>• luminosidade</a:t>
             </a:r>
-            <a:endParaRPr lang="en-US" sz="1150" dirty="0"/>
+            <a:endParaRPr lang="en-US" sz="1600" dirty="0"/>
           </a:p>
         </p:txBody>
       </p:sp>
@@ -27919,7 +27919,7 @@
               <a:buNone/>
             </a:pPr>
             <a:r>
-              <a:rPr lang="en-US" sz="1150" dirty="0">
+              <a:rPr lang="en-US" sz="1400" dirty="0">
                 <a:solidFill>
                   <a:srgbClr val="1E293B"/>
                 </a:solidFill>
@@ -27929,14 +27929,14 @@
               </a:rPr>
               <a:t>• presença</a:t>
             </a:r>
-            <a:endParaRPr lang="en-US" sz="1150" dirty="0"/>
-          </a:p>
-          <a:p>
-            <a:pPr marL="0" indent="0">
-              <a:buNone/>
-            </a:pPr>
-            <a:r>
-              <a:rPr lang="en-US" sz="1150" dirty="0">
+            <a:endParaRPr lang="en-US" sz="1400" dirty="0"/>
+          </a:p>
+          <a:p>
+            <a:pPr marL="0" indent="0">
+              <a:buNone/>
+            </a:pPr>
+            <a:r>
+              <a:rPr lang="en-US" sz="1400" dirty="0">
                 <a:solidFill>
                   <a:srgbClr val="1E293B"/>
                 </a:solidFill>
@@ -27946,14 +27946,14 @@
               </a:rPr>
               <a:t>• contagem</a:t>
             </a:r>
-            <a:endParaRPr lang="en-US" sz="1150" dirty="0"/>
-          </a:p>
-          <a:p>
-            <a:pPr marL="0" indent="0">
-              <a:buNone/>
-            </a:pPr>
-            <a:r>
-              <a:rPr lang="en-US" sz="1150" dirty="0">
+            <a:endParaRPr lang="en-US" sz="1400" dirty="0"/>
+          </a:p>
+          <a:p>
+            <a:pPr marL="0" indent="0">
+              <a:buNone/>
+            </a:pPr>
+            <a:r>
+              <a:rPr lang="en-US" sz="1400" dirty="0">
                 <a:solidFill>
                   <a:srgbClr val="1E293B"/>
                 </a:solidFill>
@@ -27963,7 +27963,7 @@
               </a:rPr>
               <a:t>• porta aberta</a:t>
             </a:r>
-            <a:endParaRPr lang="en-US" sz="1150" dirty="0"/>
+            <a:endParaRPr lang="en-US" sz="1400" dirty="0"/>
           </a:p>
         </p:txBody>
       </p:sp>
@@ -28010,7 +28010,7 @@
           </a:prstGeom>
           <a:extLst>
             <a:ext uri="{C572A759-6A51-4108-AA02-DFA0A04FC94B}">
-              <ma14:wrappingTextBoxFlag xmlns:ma14="http://schemas.microsoft.com/office/mac/drawingml/2011/main" xmlns="" val="0"/>
+              <ma14:wrappingTextBoxFlag xmlns="" xmlns:ma14="http://schemas.microsoft.com/office/mac/drawingml/2011/main" val="0"/>
             </a:ext>
           </a:extLst>
         </p:spPr>
@@ -28752,7 +28752,7 @@
           </a:prstGeom>
           <a:extLst>
             <a:ext uri="{C572A759-6A51-4108-AA02-DFA0A04FC94B}">
-              <ma14:wrappingTextBoxFlag xmlns:ma14="http://schemas.microsoft.com/office/mac/drawingml/2011/main" xmlns="" val="0"/>
+              <ma14:wrappingTextBoxFlag xmlns="" xmlns:ma14="http://schemas.microsoft.com/office/mac/drawingml/2011/main" val="0"/>
             </a:ext>
           </a:extLst>
         </p:spPr>
@@ -29351,7 +29351,7 @@
           </a:prstGeom>
           <a:extLst>
             <a:ext uri="{C572A759-6A51-4108-AA02-DFA0A04FC94B}">
-              <ma14:wrappingTextBoxFlag xmlns:ma14="http://schemas.microsoft.com/office/mac/drawingml/2011/main" xmlns="" val="0"/>
+              <ma14:wrappingTextBoxFlag xmlns="" xmlns:ma14="http://schemas.microsoft.com/office/mac/drawingml/2011/main" val="0"/>
             </a:ext>
           </a:extLst>
         </p:spPr>
